--- a/dist/초3/수학/도형과측정/초3_수학_도형과측정_04_mm와km.pptx
+++ b/dist/초3/수학/도형과측정/초3_수학_도형과측정_04_mm와km.pptx
@@ -122,13 +122,13 @@
   <p:extLst>
     <p:ext uri="{521415D9-36F7-43E2-AB2F-B90AF26B5E84}">
       <p14:sectionLst xmlns:p14="http://schemas.microsoft.com/office/powerpoint/2010/main">
-        <p14:section name="도입" id="{fa28e3b5-0878-0ac4-fe4c-3e379030469b}">
+        <p14:section name="도입" id="{5b7d9524-b806-4d3c-ccaf-d7e8f29d0caf}">
           <p14:sldIdLst>
             <p14:sldId id="256"/>
             <p14:sldId id="257"/>
           </p14:sldIdLst>
         </p14:section>
-        <p14:section name="개념" id="{3e85e81c-4c10-b055-7289-927f853ed7fb}">
+        <p14:section name="개념" id="{88e4973b-13f1-3630-34ce-1d6a8dcecf71}">
           <p14:sldIdLst>
             <p14:sldId id="258"/>
             <p14:sldId id="259"/>
@@ -136,7 +136,7 @@
             <p14:sldId id="264"/>
           </p14:sldIdLst>
         </p14:section>
-        <p14:section name="연습" id="{2015beb2-ee45-2ba5-0d49-16acafb38b4f}">
+        <p14:section name="연습" id="{bb9fbbb5-923b-0489-7c3f-d1cc84980319}">
           <p14:sldIdLst>
             <p14:sldId id="260"/>
             <p14:sldId id="261"/>
@@ -145,25 +145,25 @@
             <p14:sldId id="266"/>
           </p14:sldIdLst>
         </p14:section>
-        <p14:section name="개념" id="{b609160e-cd12-eafe-b0de-f0fb009fdf1f}">
+        <p14:section name="개념" id="{9bfbe257-2bee-0a7f-b069-d2b48a591b55}">
           <p14:sldIdLst/>
         </p14:section>
-        <p14:section name="연습" id="{5169219d-7af9-e5b6-c5c1-edd3af91305d}">
+        <p14:section name="연습" id="{c8c26e40-671f-cc19-980e-8922ba38dff8}">
           <p14:sldIdLst/>
         </p14:section>
-        <p14:section name="확인" id="{12bb7069-ea54-e153-3fd1-5d2673dec742}">
+        <p14:section name="확인" id="{22bf0377-8e65-02a8-3234-d41cd9de2949}">
           <p14:sldIdLst>
             <p14:sldId id="267"/>
             <p14:sldId id="268"/>
             <p14:sldId id="269"/>
           </p14:sldIdLst>
         </p14:section>
-        <p14:section name="정리" id="{4dbbc227-f449-f03a-01bb-e3e6b07a3502}">
+        <p14:section name="정리" id="{a7b7cc70-198a-de6f-7fa5-0481bfb4bbc7}">
           <p14:sldIdLst>
             <p14:sldId id="270"/>
           </p14:sldIdLst>
         </p14:section>
-        <p14:section name="보충" id="{662f3746-ccee-6b56-03bd-2f46a201b812}">
+        <p14:section name="보충" id="{16132d21-039a-5e25-a203-59f5ec319575}">
           <p14:sldIdLst>
             <p14:sldId id="271"/>
           </p14:sldIdLst>
@@ -1192,7 +1192,7 @@
 - S03과 S08을 다시 보여 줍니다.
 주의
 - 복습 세 문제는 다음 수업을 시작할 때 활동지 마지막 쪽과 함께 풉니다.
-- 길이의 덧셈·뺄셈(예: 3 cm 5 mm + 2 cm 8 mm)은 이 차시에서 다루지 않았습니다. 학교 진도에 나오면 따로 연습합니다.</a:t>
+- 길이의 덧셈·뺄셈(예: 3 cm 5 mm + 2 cm 8 mm)은 ‘길이의 덧셈과 뺄셈’ 차시에서 배웁니다.</a:t>
             </a:r>
             <a:endParaRPr lang="en-US" dirty="0"/>
           </a:p>
